--- a/HR Analysis Project.pptx
+++ b/HR Analysis Project.pptx
@@ -38183,8 +38183,8 @@
         </p:nvSpPr>
         <p:spPr>
           <a:xfrm>
-            <a:off x="3990892" y="4673734"/>
-            <a:ext cx="5669092" cy="769441"/>
+            <a:off x="3454046" y="4707266"/>
+            <a:ext cx="5669092" cy="415498"/>
           </a:xfrm>
           <a:prstGeom prst="rect">
             <a:avLst/>
@@ -38197,48 +38197,109 @@
           </a:bodyPr>
           <a:lstStyle/>
           <a:p>
+            <a:pPr rtl="0"/>
             <a:r>
-              <a:rPr lang="en-SG" sz="1100" dirty="0">
-                <a:solidFill>
-                  <a:schemeClr val="bg2">
-                    <a:lumMod val="10000"/>
-                  </a:schemeClr>
+              <a:rPr lang="en-SG" sz="1050" b="0" i="0" u="none" strike="noStrike" dirty="0">
+                <a:solidFill>
+                  <a:srgbClr val="181513"/>
                 </a:solidFill>
                 <a:effectLst/>
-                <a:latin typeface="+mj-lt"/>
-                <a:hlinkClick r:id="rId4"/>
+                <a:latin typeface="Arial" panose="020B0604020202020204" pitchFamily="34" charset="0"/>
               </a:rPr>
-              <a:t>https://public.tableau.com/views/GlintsTab/Dashboard?:language=en-US&amp;:display_count=n&amp;:origin=viz_share_link</a:t>
+              <a:t>https://</a:t>
             </a:r>
-            <a:endParaRPr lang="en-SG" sz="1100" dirty="0">
-              <a:solidFill>
-                <a:schemeClr val="bg2">
-                  <a:lumMod val="10000"/>
-                </a:schemeClr>
-              </a:solidFill>
+            <a:r>
+              <a:rPr lang="en-SG" sz="1050" b="0" i="0" u="none" strike="noStrike" dirty="0" err="1">
+                <a:solidFill>
+                  <a:srgbClr val="181513"/>
+                </a:solidFill>
+                <a:effectLst/>
+                <a:latin typeface="Arial" panose="020B0604020202020204" pitchFamily="34" charset="0"/>
+              </a:rPr>
+              <a:t>public.tableau.com</a:t>
+            </a:r>
+            <a:r>
+              <a:rPr lang="en-SG" sz="1050" b="0" i="0" u="none" strike="noStrike" dirty="0">
+                <a:solidFill>
+                  <a:srgbClr val="181513"/>
+                </a:solidFill>
+                <a:effectLst/>
+                <a:latin typeface="Arial" panose="020B0604020202020204" pitchFamily="34" charset="0"/>
+              </a:rPr>
+              <a:t>/views/HRAnalysisDashboard_17389406352520/Dashboard?:language=</a:t>
+            </a:r>
+            <a:r>
+              <a:rPr lang="en-SG" sz="1050" b="0" i="0" u="none" strike="noStrike" dirty="0" err="1">
+                <a:solidFill>
+                  <a:srgbClr val="181513"/>
+                </a:solidFill>
+                <a:effectLst/>
+                <a:latin typeface="Arial" panose="020B0604020202020204" pitchFamily="34" charset="0"/>
+              </a:rPr>
+              <a:t>en</a:t>
+            </a:r>
+            <a:r>
+              <a:rPr lang="en-SG" sz="1050" b="0" i="0" u="none" strike="noStrike" dirty="0">
+                <a:solidFill>
+                  <a:srgbClr val="181513"/>
+                </a:solidFill>
+                <a:effectLst/>
+                <a:latin typeface="Arial" panose="020B0604020202020204" pitchFamily="34" charset="0"/>
+              </a:rPr>
+              <a:t>-US&amp;:</a:t>
+            </a:r>
+            <a:r>
+              <a:rPr lang="en-SG" sz="1050" b="0" i="0" u="none" strike="noStrike" dirty="0" err="1">
+                <a:solidFill>
+                  <a:srgbClr val="181513"/>
+                </a:solidFill>
+                <a:effectLst/>
+                <a:latin typeface="Arial" panose="020B0604020202020204" pitchFamily="34" charset="0"/>
+              </a:rPr>
+              <a:t>sid</a:t>
+            </a:r>
+            <a:r>
+              <a:rPr lang="en-SG" sz="1050" b="0" i="0" u="none" strike="noStrike" dirty="0">
+                <a:solidFill>
+                  <a:srgbClr val="181513"/>
+                </a:solidFill>
+                <a:effectLst/>
+                <a:latin typeface="Arial" panose="020B0604020202020204" pitchFamily="34" charset="0"/>
+              </a:rPr>
+              <a:t>=&amp;:redirect=auth&amp;:</a:t>
+            </a:r>
+            <a:r>
+              <a:rPr lang="en-SG" sz="1050" b="0" i="0" u="none" strike="noStrike" dirty="0" err="1">
+                <a:solidFill>
+                  <a:srgbClr val="181513"/>
+                </a:solidFill>
+                <a:effectLst/>
+                <a:latin typeface="Arial" panose="020B0604020202020204" pitchFamily="34" charset="0"/>
+              </a:rPr>
+              <a:t>display_count</a:t>
+            </a:r>
+            <a:r>
+              <a:rPr lang="en-SG" sz="1050" b="0" i="0" u="none" strike="noStrike" dirty="0">
+                <a:solidFill>
+                  <a:srgbClr val="181513"/>
+                </a:solidFill>
+                <a:effectLst/>
+                <a:latin typeface="Arial" panose="020B0604020202020204" pitchFamily="34" charset="0"/>
+              </a:rPr>
+              <a:t>=n&amp;:origin=</a:t>
+            </a:r>
+            <a:r>
+              <a:rPr lang="en-SG" sz="1050" b="0" i="0" u="none" strike="noStrike" dirty="0" err="1">
+                <a:solidFill>
+                  <a:srgbClr val="181513"/>
+                </a:solidFill>
+                <a:effectLst/>
+                <a:latin typeface="Arial" panose="020B0604020202020204" pitchFamily="34" charset="0"/>
+              </a:rPr>
+              <a:t>viz_share_link</a:t>
+            </a:r>
+            <a:endParaRPr lang="en-SG" sz="1050" b="0" dirty="0">
               <a:effectLst/>
-              <a:latin typeface="+mj-lt"/>
-            </a:endParaRPr>
-          </a:p>
-          <a:p>
-            <a:endParaRPr lang="en-SG" sz="1100" dirty="0">
-              <a:solidFill>
-                <a:schemeClr val="bg2">
-                  <a:lumMod val="10000"/>
-                </a:schemeClr>
-              </a:solidFill>
-              <a:effectLst/>
-              <a:latin typeface="+mj-lt"/>
-            </a:endParaRPr>
-          </a:p>
-          <a:p>
-            <a:endParaRPr lang="en-US" sz="1100" dirty="0">
-              <a:solidFill>
-                <a:schemeClr val="bg2">
-                  <a:lumMod val="10000"/>
-                </a:schemeClr>
-              </a:solidFill>
-              <a:latin typeface="+mj-lt"/>
             </a:endParaRPr>
           </a:p>
         </p:txBody>
